--- a/Research_Cell_Presentation.pptx
+++ b/Research_Cell_Presentation.pptx
@@ -521,6 +521,934 @@
         <p:txBody>
           <a:bodyPr/>
           <a:lstStyle/>
+          <a:p>
+            <a:r>
+              <a:rPr lang="en-US" b="1" dirty="0"/>
+              <a:t>Good morning everyone.</a:t>
+            </a:r>
+            <a:endParaRPr lang="en-US" dirty="0"/>
+          </a:p>
+          <a:p>
+            <a:r>
+              <a:rPr lang="en-US" dirty="0"/>
+              <a:t>Our project is </a:t>
+            </a:r>
+            <a:r>
+              <a:rPr lang="en-US" b="1" dirty="0"/>
+              <a:t>DHSGU Research Cell</a:t>
+            </a:r>
+            <a:r>
+              <a:rPr lang="en-US" dirty="0"/>
+              <a:t>, a centralized research platform designed for </a:t>
+            </a:r>
+            <a:r>
+              <a:rPr lang="en-US" b="1" dirty="0"/>
+              <a:t>students, scholars, and professors</a:t>
+            </a:r>
+            <a:r>
+              <a:rPr lang="en-US" dirty="0"/>
+              <a:t> of Dr. </a:t>
+            </a:r>
+            <a:r>
+              <a:rPr lang="en-US" dirty="0" err="1"/>
+              <a:t>Harisingh</a:t>
+            </a:r>
+            <a:r>
+              <a:rPr lang="en-US" dirty="0"/>
+              <a:t> Gour Vishwavidyalaya.</a:t>
+            </a:r>
+          </a:p>
+          <a:p>
+            <a:r>
+              <a:rPr lang="en-US" dirty="0"/>
+              <a:t>The main purpose of this application is to bring all university research-related information into </a:t>
+            </a:r>
+            <a:r>
+              <a:rPr lang="en-US" b="1" dirty="0"/>
+              <a:t>one platform</a:t>
+            </a:r>
+            <a:r>
+              <a:rPr lang="en-US" dirty="0"/>
+              <a:t>.</a:t>
+            </a:r>
+          </a:p>
+          <a:p>
+            <a:r>
+              <a:rPr lang="en-US" dirty="0"/>
+              <a:t>Through this application:</a:t>
+            </a:r>
+          </a:p>
+          <a:p>
+            <a:pPr lvl="0"/>
+            <a:r>
+              <a:rPr lang="en-US" dirty="0"/>
+              <a:t>Students and researchers can easily find </a:t>
+            </a:r>
+            <a:r>
+              <a:rPr lang="en-US" b="1" dirty="0"/>
+              <a:t>research information and opportunities</a:t>
+            </a:r>
+            <a:r>
+              <a:rPr lang="en-US" dirty="0"/>
+              <a:t>.</a:t>
+            </a:r>
+          </a:p>
+          <a:p>
+            <a:pPr lvl="0"/>
+            <a:r>
+              <a:rPr lang="en-US" dirty="0"/>
+              <a:t>Professors and researchers can create and maintain their </a:t>
+            </a:r>
+            <a:r>
+              <a:rPr lang="en-US" b="1" dirty="0"/>
+              <a:t>professional profiles</a:t>
+            </a:r>
+            <a:r>
+              <a:rPr lang="en-US" dirty="0"/>
+              <a:t>.</a:t>
+            </a:r>
+          </a:p>
+          <a:p>
+            <a:pPr lvl="0"/>
+            <a:r>
+              <a:rPr lang="en-US" dirty="0"/>
+              <a:t>Users can manage </a:t>
+            </a:r>
+            <a:r>
+              <a:rPr lang="en-US" b="1" dirty="0"/>
+              <a:t>research projects, papers, publications, and patents</a:t>
+            </a:r>
+            <a:r>
+              <a:rPr lang="en-US" dirty="0"/>
+              <a:t>.</a:t>
+            </a:r>
+          </a:p>
+          <a:p>
+            <a:pPr lvl="0"/>
+            <a:r>
+              <a:rPr lang="en-US" dirty="0"/>
+              <a:t>The system provides notifications about </a:t>
+            </a:r>
+            <a:r>
+              <a:rPr lang="en-US" b="1" dirty="0"/>
+              <a:t>funding opportunities, conferences, and other research events</a:t>
+            </a:r>
+            <a:r>
+              <a:rPr lang="en-US" dirty="0"/>
+              <a:t>.</a:t>
+            </a:r>
+          </a:p>
+          <a:p>
+            <a:pPr lvl="0"/>
+            <a:r>
+              <a:rPr lang="en-US" dirty="0"/>
+              <a:t>Researchers can also </a:t>
+            </a:r>
+            <a:r>
+              <a:rPr lang="en-US" b="1" dirty="0"/>
+              <a:t>submit project proposals and track their approval status</a:t>
+            </a:r>
+            <a:r>
+              <a:rPr lang="en-US" dirty="0"/>
+              <a:t>.</a:t>
+            </a:r>
+          </a:p>
+          <a:p>
+            <a:pPr lvl="0"/>
+            <a:r>
+              <a:rPr lang="en-US" dirty="0"/>
+              <a:t>It maintains records of </a:t>
+            </a:r>
+            <a:r>
+              <a:rPr lang="en-US" b="1" dirty="0"/>
+              <a:t>papers, books, patents, projects, and conferences</a:t>
+            </a:r>
+            <a:r>
+              <a:rPr lang="en-US" dirty="0"/>
+              <a:t>.</a:t>
+            </a:r>
+          </a:p>
+          <a:p>
+            <a:r>
+              <a:rPr lang="en-US" dirty="0"/>
+              <a:t>In simple words, </a:t>
+            </a:r>
+            <a:r>
+              <a:rPr lang="en-US" b="1" dirty="0"/>
+              <a:t>DHSGU Research Cell makes university research more organized, accessible, and connected.</a:t>
+            </a:r>
+            <a:endParaRPr lang="en-US" dirty="0"/>
+          </a:p>
+          <a:p>
+            <a:r>
+              <a:rPr lang="en-US" dirty="0"/>
+              <a:t>Our goal is to create a </a:t>
+            </a:r>
+            <a:r>
+              <a:rPr lang="en-US" b="1" dirty="0"/>
+              <a:t>single digital platform that helps students, scholars, and professors collaborate and grow in research.</a:t>
+            </a:r>
+            <a:endParaRPr lang="en-US" dirty="0"/>
+          </a:p>
+          <a:p>
+            <a:endParaRPr lang="en-US" dirty="0"/>
+          </a:p>
+        </p:txBody>
+      </p:sp>
+      <p:sp>
+        <p:nvSpPr>
+          <p:cNvPr id="4" name="Slide Number Placeholder 3"/>
+          <p:cNvSpPr>
+            <a:spLocks noGrp="1"/>
+          </p:cNvSpPr>
+          <p:nvPr>
+            <p:ph type="sldNum" sz="quarter" idx="5"/>
+          </p:nvPr>
+        </p:nvSpPr>
+        <p:spPr/>
+        <p:txBody>
+          <a:bodyPr/>
+          <a:lstStyle/>
+          <a:p>
+            <a:fld id="{0E44CD6B-EFE2-4D81-B11E-40B65F91B7D8}" type="slidenum">
+              <a:rPr lang="en-US" smtClean="0"/>
+              <a:t>1</a:t>
+            </a:fld>
+            <a:endParaRPr lang="en-US"/>
+          </a:p>
+        </p:txBody>
+      </p:sp>
+    </p:spTree>
+    <p:extLst>
+      <p:ext uri="{BB962C8B-B14F-4D97-AF65-F5344CB8AC3E}">
+        <p14:creationId xmlns:p14="http://schemas.microsoft.com/office/powerpoint/2010/main" val="931649843"/>
+      </p:ext>
+    </p:extLst>
+  </p:cSld>
+  <p:clrMapOvr>
+    <a:masterClrMapping/>
+  </p:clrMapOvr>
+</p:notes>
+</file>
+
+<file path=ppt/notesSlides/notesSlide2.xml><?xml version="1.0" encoding="utf-8"?>
+<p:notes xmlns:a="http://schemas.openxmlformats.org/drawingml/2006/main" xmlns:r="http://schemas.openxmlformats.org/officeDocument/2006/relationships" xmlns:p="http://schemas.openxmlformats.org/presentationml/2006/main">
+  <p:cSld>
+    <p:spTree>
+      <p:nvGrpSpPr>
+        <p:cNvPr id="1" name=""/>
+        <p:cNvGrpSpPr/>
+        <p:nvPr/>
+      </p:nvGrpSpPr>
+      <p:grpSpPr>
+        <a:xfrm>
+          <a:off x="0" y="0"/>
+          <a:ext cx="0" cy="0"/>
+          <a:chOff x="0" y="0"/>
+          <a:chExt cx="0" cy="0"/>
+        </a:xfrm>
+      </p:grpSpPr>
+      <p:sp>
+        <p:nvSpPr>
+          <p:cNvPr id="2" name="Slide Image Placeholder 1"/>
+          <p:cNvSpPr>
+            <a:spLocks noGrp="1" noRot="1" noChangeAspect="1"/>
+          </p:cNvSpPr>
+          <p:nvPr>
+            <p:ph type="sldImg"/>
+          </p:nvPr>
+        </p:nvSpPr>
+        <p:spPr/>
+      </p:sp>
+      <p:sp>
+        <p:nvSpPr>
+          <p:cNvPr id="3" name="Notes Placeholder 2"/>
+          <p:cNvSpPr>
+            <a:spLocks noGrp="1"/>
+          </p:cNvSpPr>
+          <p:nvPr>
+            <p:ph type="body" idx="1"/>
+          </p:nvPr>
+        </p:nvSpPr>
+        <p:spPr/>
+        <p:txBody>
+          <a:bodyPr/>
+          <a:lstStyle/>
+          <a:p>
+            <a:r>
+              <a:rPr lang="en-US" b="1" dirty="0"/>
+              <a:t>Good morning everyone.</a:t>
+            </a:r>
+            <a:endParaRPr lang="en-US" dirty="0"/>
+          </a:p>
+          <a:p>
+            <a:r>
+              <a:rPr lang="en-US" dirty="0"/>
+              <a:t>Our project is </a:t>
+            </a:r>
+            <a:r>
+              <a:rPr lang="en-US" b="1" dirty="0"/>
+              <a:t>DHSGU Research Cell</a:t>
+            </a:r>
+            <a:r>
+              <a:rPr lang="en-US" dirty="0"/>
+              <a:t>, a centralized research platform designed for </a:t>
+            </a:r>
+            <a:r>
+              <a:rPr lang="en-US" b="1" dirty="0"/>
+              <a:t>students, scholars, and professors</a:t>
+            </a:r>
+            <a:r>
+              <a:rPr lang="en-US" dirty="0"/>
+              <a:t> of Dr. </a:t>
+            </a:r>
+            <a:r>
+              <a:rPr lang="en-US" dirty="0" err="1"/>
+              <a:t>Harisingh</a:t>
+            </a:r>
+            <a:r>
+              <a:rPr lang="en-US" dirty="0"/>
+              <a:t> Gour Vishwavidyalaya.</a:t>
+            </a:r>
+          </a:p>
+          <a:p>
+            <a:r>
+              <a:rPr lang="en-US" dirty="0"/>
+              <a:t>The main purpose of this application is to bring all university research-related information into </a:t>
+            </a:r>
+            <a:r>
+              <a:rPr lang="en-US" b="1" dirty="0"/>
+              <a:t>one platform</a:t>
+            </a:r>
+            <a:r>
+              <a:rPr lang="en-US" dirty="0"/>
+              <a:t>.</a:t>
+            </a:r>
+          </a:p>
+          <a:p>
+            <a:r>
+              <a:rPr lang="en-US" dirty="0"/>
+              <a:t>Through this application:</a:t>
+            </a:r>
+          </a:p>
+          <a:p>
+            <a:pPr lvl="0"/>
+            <a:r>
+              <a:rPr lang="en-US" dirty="0"/>
+              <a:t>Students and researchers can easily find </a:t>
+            </a:r>
+            <a:r>
+              <a:rPr lang="en-US" b="1" dirty="0"/>
+              <a:t>research information and opportunities</a:t>
+            </a:r>
+            <a:r>
+              <a:rPr lang="en-US" dirty="0"/>
+              <a:t>.</a:t>
+            </a:r>
+          </a:p>
+          <a:p>
+            <a:pPr lvl="0"/>
+            <a:r>
+              <a:rPr lang="en-US" dirty="0"/>
+              <a:t>Professors and researchers can create and maintain their </a:t>
+            </a:r>
+            <a:r>
+              <a:rPr lang="en-US" b="1" dirty="0"/>
+              <a:t>professional profiles</a:t>
+            </a:r>
+            <a:r>
+              <a:rPr lang="en-US" dirty="0"/>
+              <a:t>.</a:t>
+            </a:r>
+          </a:p>
+          <a:p>
+            <a:pPr lvl="0"/>
+            <a:r>
+              <a:rPr lang="en-US" dirty="0"/>
+              <a:t>Users can manage </a:t>
+            </a:r>
+            <a:r>
+              <a:rPr lang="en-US" b="1" dirty="0"/>
+              <a:t>research projects, papers, publications, and patents</a:t>
+            </a:r>
+            <a:r>
+              <a:rPr lang="en-US" dirty="0"/>
+              <a:t>.</a:t>
+            </a:r>
+          </a:p>
+          <a:p>
+            <a:pPr lvl="0"/>
+            <a:r>
+              <a:rPr lang="en-US" dirty="0"/>
+              <a:t>The system provides notifications about </a:t>
+            </a:r>
+            <a:r>
+              <a:rPr lang="en-US" b="1" dirty="0"/>
+              <a:t>funding opportunities, conferences, and other research events</a:t>
+            </a:r>
+            <a:r>
+              <a:rPr lang="en-US" dirty="0"/>
+              <a:t>.</a:t>
+            </a:r>
+          </a:p>
+          <a:p>
+            <a:pPr lvl="0"/>
+            <a:r>
+              <a:rPr lang="en-US" dirty="0"/>
+              <a:t>Researchers can also </a:t>
+            </a:r>
+            <a:r>
+              <a:rPr lang="en-US" b="1" dirty="0"/>
+              <a:t>submit project proposals and track their approval status</a:t>
+            </a:r>
+            <a:r>
+              <a:rPr lang="en-US" dirty="0"/>
+              <a:t>.</a:t>
+            </a:r>
+          </a:p>
+          <a:p>
+            <a:pPr lvl="0"/>
+            <a:r>
+              <a:rPr lang="en-US" dirty="0"/>
+              <a:t>It maintains records of </a:t>
+            </a:r>
+            <a:r>
+              <a:rPr lang="en-US" b="1" dirty="0"/>
+              <a:t>papers, books, patents, projects, and conferences</a:t>
+            </a:r>
+            <a:r>
+              <a:rPr lang="en-US" dirty="0"/>
+              <a:t>.</a:t>
+            </a:r>
+          </a:p>
+          <a:p>
+            <a:r>
+              <a:rPr lang="en-US" dirty="0"/>
+              <a:t>In simple words, </a:t>
+            </a:r>
+            <a:r>
+              <a:rPr lang="en-US" b="1" dirty="0"/>
+              <a:t>DHSGU Research Cell makes university research more organized, accessible, and connected.</a:t>
+            </a:r>
+            <a:endParaRPr lang="en-US" dirty="0"/>
+          </a:p>
+          <a:p>
+            <a:r>
+              <a:rPr lang="en-US" dirty="0"/>
+              <a:t>Our goal is to create a </a:t>
+            </a:r>
+            <a:r>
+              <a:rPr lang="en-US" b="1" dirty="0"/>
+              <a:t>single digital platform that helps students, scholars, and professors collaborate and grow in research.</a:t>
+            </a:r>
+            <a:endParaRPr lang="en-US" dirty="0"/>
+          </a:p>
+          <a:p>
+            <a:endParaRPr lang="en-US" dirty="0"/>
+          </a:p>
+        </p:txBody>
+      </p:sp>
+      <p:sp>
+        <p:nvSpPr>
+          <p:cNvPr id="4" name="Slide Number Placeholder 3"/>
+          <p:cNvSpPr>
+            <a:spLocks noGrp="1"/>
+          </p:cNvSpPr>
+          <p:nvPr>
+            <p:ph type="sldNum" sz="quarter" idx="5"/>
+          </p:nvPr>
+        </p:nvSpPr>
+        <p:spPr/>
+        <p:txBody>
+          <a:bodyPr/>
+          <a:lstStyle/>
+          <a:p>
+            <a:fld id="{0E44CD6B-EFE2-4D81-B11E-40B65F91B7D8}" type="slidenum">
+              <a:rPr lang="en-US" smtClean="0"/>
+              <a:t>2</a:t>
+            </a:fld>
+            <a:endParaRPr lang="en-US"/>
+          </a:p>
+        </p:txBody>
+      </p:sp>
+    </p:spTree>
+    <p:extLst>
+      <p:ext uri="{BB962C8B-B14F-4D97-AF65-F5344CB8AC3E}">
+        <p14:creationId xmlns:p14="http://schemas.microsoft.com/office/powerpoint/2010/main" val="3751536361"/>
+      </p:ext>
+    </p:extLst>
+  </p:cSld>
+  <p:clrMapOvr>
+    <a:masterClrMapping/>
+  </p:clrMapOvr>
+</p:notes>
+</file>
+
+<file path=ppt/notesSlides/notesSlide3.xml><?xml version="1.0" encoding="utf-8"?>
+<p:notes xmlns:a="http://schemas.openxmlformats.org/drawingml/2006/main" xmlns:r="http://schemas.openxmlformats.org/officeDocument/2006/relationships" xmlns:p="http://schemas.openxmlformats.org/presentationml/2006/main">
+  <p:cSld>
+    <p:spTree>
+      <p:nvGrpSpPr>
+        <p:cNvPr id="1" name=""/>
+        <p:cNvGrpSpPr/>
+        <p:nvPr/>
+      </p:nvGrpSpPr>
+      <p:grpSpPr>
+        <a:xfrm>
+          <a:off x="0" y="0"/>
+          <a:ext cx="0" cy="0"/>
+          <a:chOff x="0" y="0"/>
+          <a:chExt cx="0" cy="0"/>
+        </a:xfrm>
+      </p:grpSpPr>
+      <p:sp>
+        <p:nvSpPr>
+          <p:cNvPr id="2" name="Slide Image Placeholder 1"/>
+          <p:cNvSpPr>
+            <a:spLocks noGrp="1" noRot="1" noChangeAspect="1"/>
+          </p:cNvSpPr>
+          <p:nvPr>
+            <p:ph type="sldImg"/>
+          </p:nvPr>
+        </p:nvSpPr>
+        <p:spPr/>
+      </p:sp>
+      <p:sp>
+        <p:nvSpPr>
+          <p:cNvPr id="3" name="Notes Placeholder 2"/>
+          <p:cNvSpPr>
+            <a:spLocks noGrp="1"/>
+          </p:cNvSpPr>
+          <p:nvPr>
+            <p:ph type="body" idx="1"/>
+          </p:nvPr>
+        </p:nvSpPr>
+        <p:spPr/>
+        <p:txBody>
+          <a:bodyPr/>
+          <a:lstStyle/>
+          <a:p>
+            <a:r>
+              <a:rPr lang="en-US" b="1" dirty="0"/>
+              <a:t>Good morning everyone.</a:t>
+            </a:r>
+            <a:endParaRPr lang="en-US" dirty="0"/>
+          </a:p>
+          <a:p>
+            <a:r>
+              <a:rPr lang="en-US" dirty="0"/>
+              <a:t>Our project is </a:t>
+            </a:r>
+            <a:r>
+              <a:rPr lang="en-US" b="1" dirty="0"/>
+              <a:t>DHSGU Research Cell</a:t>
+            </a:r>
+            <a:r>
+              <a:rPr lang="en-US" dirty="0"/>
+              <a:t>, a centralized research platform designed for </a:t>
+            </a:r>
+            <a:r>
+              <a:rPr lang="en-US" b="1" dirty="0"/>
+              <a:t>students, scholars, and professors</a:t>
+            </a:r>
+            <a:r>
+              <a:rPr lang="en-US" dirty="0"/>
+              <a:t> of Dr. </a:t>
+            </a:r>
+            <a:r>
+              <a:rPr lang="en-US" dirty="0" err="1"/>
+              <a:t>Harisingh</a:t>
+            </a:r>
+            <a:r>
+              <a:rPr lang="en-US" dirty="0"/>
+              <a:t> Gour Vishwavidyalaya.</a:t>
+            </a:r>
+          </a:p>
+          <a:p>
+            <a:r>
+              <a:rPr lang="en-US" dirty="0"/>
+              <a:t>The main purpose of this application is to bring all university research-related information into </a:t>
+            </a:r>
+            <a:r>
+              <a:rPr lang="en-US" b="1" dirty="0"/>
+              <a:t>one platform</a:t>
+            </a:r>
+            <a:r>
+              <a:rPr lang="en-US" dirty="0"/>
+              <a:t>.</a:t>
+            </a:r>
+          </a:p>
+          <a:p>
+            <a:r>
+              <a:rPr lang="en-US" dirty="0"/>
+              <a:t>Through this application:</a:t>
+            </a:r>
+          </a:p>
+          <a:p>
+            <a:pPr lvl="0"/>
+            <a:r>
+              <a:rPr lang="en-US" dirty="0"/>
+              <a:t>Students and researchers can easily find </a:t>
+            </a:r>
+            <a:r>
+              <a:rPr lang="en-US" b="1" dirty="0"/>
+              <a:t>research information and opportunities</a:t>
+            </a:r>
+            <a:r>
+              <a:rPr lang="en-US" dirty="0"/>
+              <a:t>.</a:t>
+            </a:r>
+          </a:p>
+          <a:p>
+            <a:pPr lvl="0"/>
+            <a:r>
+              <a:rPr lang="en-US" dirty="0"/>
+              <a:t>Professors and researchers can create and maintain their </a:t>
+            </a:r>
+            <a:r>
+              <a:rPr lang="en-US" b="1" dirty="0"/>
+              <a:t>professional profiles</a:t>
+            </a:r>
+            <a:r>
+              <a:rPr lang="en-US" dirty="0"/>
+              <a:t>.</a:t>
+            </a:r>
+          </a:p>
+          <a:p>
+            <a:pPr lvl="0"/>
+            <a:r>
+              <a:rPr lang="en-US" dirty="0"/>
+              <a:t>Users can manage </a:t>
+            </a:r>
+            <a:r>
+              <a:rPr lang="en-US" b="1" dirty="0"/>
+              <a:t>research projects, papers, publications, and patents</a:t>
+            </a:r>
+            <a:r>
+              <a:rPr lang="en-US" dirty="0"/>
+              <a:t>.</a:t>
+            </a:r>
+          </a:p>
+          <a:p>
+            <a:pPr lvl="0"/>
+            <a:r>
+              <a:rPr lang="en-US" dirty="0"/>
+              <a:t>The system provides notifications about </a:t>
+            </a:r>
+            <a:r>
+              <a:rPr lang="en-US" b="1" dirty="0"/>
+              <a:t>funding opportunities, conferences, and other research events</a:t>
+            </a:r>
+            <a:r>
+              <a:rPr lang="en-US" dirty="0"/>
+              <a:t>.</a:t>
+            </a:r>
+          </a:p>
+          <a:p>
+            <a:pPr lvl="0"/>
+            <a:r>
+              <a:rPr lang="en-US" dirty="0"/>
+              <a:t>Researchers can also </a:t>
+            </a:r>
+            <a:r>
+              <a:rPr lang="en-US" b="1" dirty="0"/>
+              <a:t>submit project proposals and track their approval status</a:t>
+            </a:r>
+            <a:r>
+              <a:rPr lang="en-US" dirty="0"/>
+              <a:t>.</a:t>
+            </a:r>
+          </a:p>
+          <a:p>
+            <a:pPr lvl="0"/>
+            <a:r>
+              <a:rPr lang="en-US" dirty="0"/>
+              <a:t>It maintains records of </a:t>
+            </a:r>
+            <a:r>
+              <a:rPr lang="en-US" b="1" dirty="0"/>
+              <a:t>papers, books, patents, projects, and conferences</a:t>
+            </a:r>
+            <a:r>
+              <a:rPr lang="en-US" dirty="0"/>
+              <a:t>.</a:t>
+            </a:r>
+          </a:p>
+          <a:p>
+            <a:r>
+              <a:rPr lang="en-US" dirty="0"/>
+              <a:t>In simple words, </a:t>
+            </a:r>
+            <a:r>
+              <a:rPr lang="en-US" b="1" dirty="0"/>
+              <a:t>DHSGU Research Cell makes university research more organized, accessible, and connected.</a:t>
+            </a:r>
+            <a:endParaRPr lang="en-US" dirty="0"/>
+          </a:p>
+          <a:p>
+            <a:r>
+              <a:rPr lang="en-US" dirty="0"/>
+              <a:t>Our goal is to create a </a:t>
+            </a:r>
+            <a:r>
+              <a:rPr lang="en-US" b="1" dirty="0"/>
+              <a:t>single digital platform that helps students, scholars, and professors collaborate and grow in research.</a:t>
+            </a:r>
+            <a:endParaRPr lang="en-US" dirty="0"/>
+          </a:p>
+          <a:p>
+            <a:endParaRPr lang="en-US" dirty="0"/>
+          </a:p>
+        </p:txBody>
+      </p:sp>
+      <p:sp>
+        <p:nvSpPr>
+          <p:cNvPr id="4" name="Slide Number Placeholder 3"/>
+          <p:cNvSpPr>
+            <a:spLocks noGrp="1"/>
+          </p:cNvSpPr>
+          <p:nvPr>
+            <p:ph type="sldNum" sz="quarter" idx="5"/>
+          </p:nvPr>
+        </p:nvSpPr>
+        <p:spPr/>
+        <p:txBody>
+          <a:bodyPr/>
+          <a:lstStyle/>
+          <a:p>
+            <a:fld id="{0E44CD6B-EFE2-4D81-B11E-40B65F91B7D8}" type="slidenum">
+              <a:rPr lang="en-US" smtClean="0"/>
+              <a:t>3</a:t>
+            </a:fld>
+            <a:endParaRPr lang="en-US"/>
+          </a:p>
+        </p:txBody>
+      </p:sp>
+    </p:spTree>
+    <p:extLst>
+      <p:ext uri="{BB962C8B-B14F-4D97-AF65-F5344CB8AC3E}">
+        <p14:creationId xmlns:p14="http://schemas.microsoft.com/office/powerpoint/2010/main" val="1961504506"/>
+      </p:ext>
+    </p:extLst>
+  </p:cSld>
+  <p:clrMapOvr>
+    <a:masterClrMapping/>
+  </p:clrMapOvr>
+</p:notes>
+</file>
+
+<file path=ppt/notesSlides/notesSlide4.xml><?xml version="1.0" encoding="utf-8"?>
+<p:notes xmlns:a="http://schemas.openxmlformats.org/drawingml/2006/main" xmlns:r="http://schemas.openxmlformats.org/officeDocument/2006/relationships" xmlns:p="http://schemas.openxmlformats.org/presentationml/2006/main">
+  <p:cSld>
+    <p:spTree>
+      <p:nvGrpSpPr>
+        <p:cNvPr id="1" name=""/>
+        <p:cNvGrpSpPr/>
+        <p:nvPr/>
+      </p:nvGrpSpPr>
+      <p:grpSpPr>
+        <a:xfrm>
+          <a:off x="0" y="0"/>
+          <a:ext cx="0" cy="0"/>
+          <a:chOff x="0" y="0"/>
+          <a:chExt cx="0" cy="0"/>
+        </a:xfrm>
+      </p:grpSpPr>
+      <p:sp>
+        <p:nvSpPr>
+          <p:cNvPr id="2" name="Slide Image Placeholder 1"/>
+          <p:cNvSpPr>
+            <a:spLocks noGrp="1" noRot="1" noChangeAspect="1"/>
+          </p:cNvSpPr>
+          <p:nvPr>
+            <p:ph type="sldImg"/>
+          </p:nvPr>
+        </p:nvSpPr>
+        <p:spPr/>
+      </p:sp>
+      <p:sp>
+        <p:nvSpPr>
+          <p:cNvPr id="3" name="Notes Placeholder 2"/>
+          <p:cNvSpPr>
+            <a:spLocks noGrp="1"/>
+          </p:cNvSpPr>
+          <p:nvPr>
+            <p:ph type="body" idx="1"/>
+          </p:nvPr>
+        </p:nvSpPr>
+        <p:spPr/>
+        <p:txBody>
+          <a:bodyPr/>
+          <a:lstStyle/>
+          <a:p>
+            <a:r>
+              <a:rPr lang="en-US" b="1" dirty="0"/>
+              <a:t>Good morning everyone.</a:t>
+            </a:r>
+            <a:endParaRPr lang="en-US" dirty="0"/>
+          </a:p>
+          <a:p>
+            <a:r>
+              <a:rPr lang="en-US" dirty="0"/>
+              <a:t>Our project is </a:t>
+            </a:r>
+            <a:r>
+              <a:rPr lang="en-US" b="1" dirty="0"/>
+              <a:t>DHSGU Research Cell</a:t>
+            </a:r>
+            <a:r>
+              <a:rPr lang="en-US" dirty="0"/>
+              <a:t>, a centralized research platform designed for </a:t>
+            </a:r>
+            <a:r>
+              <a:rPr lang="en-US" b="1" dirty="0"/>
+              <a:t>students, scholars, and professors</a:t>
+            </a:r>
+            <a:r>
+              <a:rPr lang="en-US" dirty="0"/>
+              <a:t> of Dr. </a:t>
+            </a:r>
+            <a:r>
+              <a:rPr lang="en-US" dirty="0" err="1"/>
+              <a:t>Harisingh</a:t>
+            </a:r>
+            <a:r>
+              <a:rPr lang="en-US" dirty="0"/>
+              <a:t> Gour Vishwavidyalaya.</a:t>
+            </a:r>
+          </a:p>
+          <a:p>
+            <a:r>
+              <a:rPr lang="en-US" dirty="0"/>
+              <a:t>The main purpose of this application is to bring all university research-related information into </a:t>
+            </a:r>
+            <a:r>
+              <a:rPr lang="en-US" b="1" dirty="0"/>
+              <a:t>one platform</a:t>
+            </a:r>
+            <a:r>
+              <a:rPr lang="en-US" dirty="0"/>
+              <a:t>.</a:t>
+            </a:r>
+          </a:p>
+          <a:p>
+            <a:r>
+              <a:rPr lang="en-US" dirty="0"/>
+              <a:t>Through this application:</a:t>
+            </a:r>
+          </a:p>
+          <a:p>
+            <a:pPr lvl="0"/>
+            <a:r>
+              <a:rPr lang="en-US" dirty="0"/>
+              <a:t>Students and researchers can easily find </a:t>
+            </a:r>
+            <a:r>
+              <a:rPr lang="en-US" b="1" dirty="0"/>
+              <a:t>research information and opportunities</a:t>
+            </a:r>
+            <a:r>
+              <a:rPr lang="en-US" dirty="0"/>
+              <a:t>.</a:t>
+            </a:r>
+          </a:p>
+          <a:p>
+            <a:pPr lvl="0"/>
+            <a:r>
+              <a:rPr lang="en-US" dirty="0"/>
+              <a:t>Professors and researchers can create and maintain their </a:t>
+            </a:r>
+            <a:r>
+              <a:rPr lang="en-US" b="1" dirty="0"/>
+              <a:t>professional profiles</a:t>
+            </a:r>
+            <a:r>
+              <a:rPr lang="en-US" dirty="0"/>
+              <a:t>.</a:t>
+            </a:r>
+          </a:p>
+          <a:p>
+            <a:pPr lvl="0"/>
+            <a:r>
+              <a:rPr lang="en-US" dirty="0"/>
+              <a:t>Users can manage </a:t>
+            </a:r>
+            <a:r>
+              <a:rPr lang="en-US" b="1" dirty="0"/>
+              <a:t>research projects, papers, publications, and patents</a:t>
+            </a:r>
+            <a:r>
+              <a:rPr lang="en-US" dirty="0"/>
+              <a:t>.</a:t>
+            </a:r>
+          </a:p>
+          <a:p>
+            <a:pPr lvl="0"/>
+            <a:r>
+              <a:rPr lang="en-US" dirty="0"/>
+              <a:t>The system provides notifications about </a:t>
+            </a:r>
+            <a:r>
+              <a:rPr lang="en-US" b="1" dirty="0"/>
+              <a:t>funding opportunities, conferences, and other research events</a:t>
+            </a:r>
+            <a:r>
+              <a:rPr lang="en-US" dirty="0"/>
+              <a:t>.</a:t>
+            </a:r>
+          </a:p>
+          <a:p>
+            <a:pPr lvl="0"/>
+            <a:r>
+              <a:rPr lang="en-US" dirty="0"/>
+              <a:t>Researchers can also </a:t>
+            </a:r>
+            <a:r>
+              <a:rPr lang="en-US" b="1" dirty="0"/>
+              <a:t>submit project proposals and track their approval status</a:t>
+            </a:r>
+            <a:r>
+              <a:rPr lang="en-US" dirty="0"/>
+              <a:t>.</a:t>
+            </a:r>
+          </a:p>
+          <a:p>
+            <a:pPr lvl="0"/>
+            <a:r>
+              <a:rPr lang="en-US" dirty="0"/>
+              <a:t>It maintains records of </a:t>
+            </a:r>
+            <a:r>
+              <a:rPr lang="en-US" b="1" dirty="0"/>
+              <a:t>papers, books, patents, projects, and conferences</a:t>
+            </a:r>
+            <a:r>
+              <a:rPr lang="en-US" dirty="0"/>
+              <a:t>.</a:t>
+            </a:r>
+          </a:p>
+          <a:p>
+            <a:r>
+              <a:rPr lang="en-US" dirty="0"/>
+              <a:t>In simple words, </a:t>
+            </a:r>
+            <a:r>
+              <a:rPr lang="en-US" b="1" dirty="0"/>
+              <a:t>DHSGU Research Cell makes university research more organized, accessible, and connected.</a:t>
+            </a:r>
+            <a:endParaRPr lang="en-US" dirty="0"/>
+          </a:p>
+          <a:p>
+            <a:r>
+              <a:rPr lang="en-US" dirty="0"/>
+              <a:t>Our goal is to create a </a:t>
+            </a:r>
+            <a:r>
+              <a:rPr lang="en-US" b="1" dirty="0"/>
+              <a:t>single digital platform that helps students, scholars, and professors collaborate and grow in research.</a:t>
+            </a:r>
+            <a:endParaRPr lang="en-US" dirty="0"/>
+          </a:p>
           <a:p>
             <a:endParaRPr lang="en-US" dirty="0"/>
           </a:p>
@@ -3587,11 +4515,14 @@
               </a:defRPr>
             </a:pPr>
             <a:r>
-              <a:rPr>
-                <a:latin typeface="TT Firs Neue" panose="020B0003030000020004" pitchFamily="34" charset="0"/>
-              </a:rPr>
-              <a:t>🏆 CODECRAFT CHALLENGE — PROBLEM 5</a:t>
-            </a:r>
+              <a:rPr dirty="0">
+                <a:latin typeface="TT Firs Neue" panose="020B0003030000020004" pitchFamily="34" charset="0"/>
+              </a:rPr>
+              <a:t>🏆 CODECRAFT CHALLENGE — PROBLEM </a:t>
+            </a:r>
+            <a:endParaRPr lang="en-US" dirty="0">
+              <a:latin typeface="TT Firs Neue" panose="020B0003030000020004" pitchFamily="34" charset="0"/>
+            </a:endParaRPr>
           </a:p>
         </p:txBody>
       </p:sp>
@@ -4263,6 +5194,96 @@
                 <a:latin typeface="TT Firs Neue" panose="020B0003030000020004" pitchFamily="34" charset="0"/>
               </a:rPr>
               <a:t>1 / 4</a:t>
+            </a:r>
+          </a:p>
+        </p:txBody>
+      </p:sp>
+      <p:pic>
+        <p:nvPicPr>
+          <p:cNvPr id="13" name="Picture 12">
+            <a:extLst>
+              <a:ext uri="{FF2B5EF4-FFF2-40B4-BE49-F238E27FC236}">
+                <a16:creationId xmlns:a16="http://schemas.microsoft.com/office/drawing/2014/main" id="{A272355F-F2C4-D6CD-6F9D-03BCE8151D72}"/>
+              </a:ext>
+            </a:extLst>
+          </p:cNvPr>
+          <p:cNvPicPr>
+            <a:picLocks noChangeAspect="1"/>
+          </p:cNvPicPr>
+          <p:nvPr/>
+        </p:nvPicPr>
+        <p:blipFill>
+          <a:blip r:embed="rId3"/>
+          <a:stretch>
+            <a:fillRect/>
+          </a:stretch>
+        </p:blipFill>
+        <p:spPr>
+          <a:xfrm>
+            <a:off x="8770441" y="39329"/>
+            <a:ext cx="3313404" cy="6779342"/>
+          </a:xfrm>
+          <a:prstGeom prst="rect">
+            <a:avLst/>
+          </a:prstGeom>
+        </p:spPr>
+      </p:pic>
+      <p:sp>
+        <p:nvSpPr>
+          <p:cNvPr id="14" name="TextBox 13">
+            <a:extLst>
+              <a:ext uri="{FF2B5EF4-FFF2-40B4-BE49-F238E27FC236}">
+                <a16:creationId xmlns:a16="http://schemas.microsoft.com/office/drawing/2014/main" id="{DA5CB9D2-BC7B-2C29-B029-7157962C4980}"/>
+              </a:ext>
+            </a:extLst>
+          </p:cNvPr>
+          <p:cNvSpPr txBox="1"/>
+          <p:nvPr/>
+        </p:nvSpPr>
+        <p:spPr>
+          <a:xfrm>
+            <a:off x="357542" y="5818480"/>
+            <a:ext cx="3078087" cy="461665"/>
+          </a:xfrm>
+          <a:prstGeom prst="rect">
+            <a:avLst/>
+          </a:prstGeom>
+          <a:noFill/>
+        </p:spPr>
+        <p:txBody>
+          <a:bodyPr wrap="none" rtlCol="0">
+            <a:spAutoFit/>
+          </a:bodyPr>
+          <a:lstStyle/>
+          <a:p>
+            <a:r>
+              <a:rPr lang="en-US" sz="1200" b="1" dirty="0">
+                <a:solidFill>
+                  <a:schemeClr val="bg1"/>
+                </a:solidFill>
+                <a:latin typeface="TT Firs Neue" panose="020B0003030000020004" pitchFamily="34" charset="0"/>
+              </a:rPr>
+              <a:t>Designed by:-</a:t>
+            </a:r>
+          </a:p>
+          <a:p>
+            <a:r>
+              <a:rPr lang="en-US" sz="1200" b="1" dirty="0">
+                <a:solidFill>
+                  <a:schemeClr val="bg1"/>
+                </a:solidFill>
+                <a:latin typeface="TT Firs Neue" panose="020B0003030000020004" pitchFamily="34" charset="0"/>
+              </a:rPr>
+              <a:t>	</a:t>
+            </a:r>
+            <a:r>
+              <a:rPr lang="en-US" sz="1200" dirty="0">
+                <a:solidFill>
+                  <a:schemeClr val="bg1"/>
+                </a:solidFill>
+                <a:latin typeface="TT Firs Neue" panose="020B0003030000020004" pitchFamily="34" charset="0"/>
+              </a:rPr>
+              <a:t>Kaushalendra Kumar (1 Year BCA)</a:t>
             </a:r>
           </a:p>
         </p:txBody>
@@ -4576,258 +5597,6 @@
       </p:sp>
       <p:sp>
         <p:nvSpPr>
-          <p:cNvPr id="9" name="Rounded Rectangle 8"/>
-          <p:cNvSpPr/>
-          <p:nvPr/>
-        </p:nvSpPr>
-        <p:spPr>
-          <a:xfrm>
-            <a:off x="4457700" y="1508760"/>
-            <a:ext cx="1600200" cy="3200400"/>
-          </a:xfrm>
-          <a:prstGeom prst="roundRect">
-            <a:avLst/>
-          </a:prstGeom>
-          <a:solidFill>
-            <a:srgbClr val="1E293B"/>
-          </a:solidFill>
-          <a:ln w="25400">
-            <a:solidFill>
-              <a:srgbClr val="10B981"/>
-            </a:solidFill>
-          </a:ln>
-        </p:spPr>
-        <p:style>
-          <a:lnRef idx="1">
-            <a:schemeClr val="accent1"/>
-          </a:lnRef>
-          <a:fillRef idx="3">
-            <a:schemeClr val="accent1"/>
-          </a:fillRef>
-          <a:effectRef idx="2">
-            <a:schemeClr val="accent1"/>
-          </a:effectRef>
-          <a:fontRef idx="minor">
-            <a:schemeClr val="lt1"/>
-          </a:fontRef>
-        </p:style>
-        <p:txBody>
-          <a:bodyPr wrap="square" lIns="137160" tIns="91440" rIns="137160" bIns="91440" rtlCol="0" anchor="ctr"/>
-          <a:lstStyle/>
-          <a:p>
-            <a:pPr algn="ctr"/>
-            <a:endParaRPr>
-              <a:latin typeface="TT Firs Neue" panose="020B0003030000020004" pitchFamily="34" charset="0"/>
-            </a:endParaRPr>
-          </a:p>
-          <a:p>
-            <a:pPr>
-              <a:defRPr sz="800"/>
-            </a:pPr>
-            <a:endParaRPr>
-              <a:latin typeface="TT Firs Neue" panose="020B0003030000020004" pitchFamily="34" charset="0"/>
-            </a:endParaRPr>
-          </a:p>
-          <a:p>
-            <a:pPr>
-              <a:defRPr sz="800"/>
-            </a:pPr>
-            <a:endParaRPr>
-              <a:latin typeface="TT Firs Neue" panose="020B0003030000020004" pitchFamily="34" charset="0"/>
-            </a:endParaRPr>
-          </a:p>
-          <a:p>
-            <a:pPr>
-              <a:defRPr sz="800"/>
-            </a:pPr>
-            <a:endParaRPr>
-              <a:latin typeface="TT Firs Neue" panose="020B0003030000020004" pitchFamily="34" charset="0"/>
-            </a:endParaRPr>
-          </a:p>
-          <a:p>
-            <a:pPr algn="ctr">
-              <a:defRPr sz="2800"/>
-            </a:pPr>
-            <a:r>
-              <a:rPr>
-                <a:latin typeface="TT Firs Neue" panose="020B0003030000020004" pitchFamily="34" charset="0"/>
-              </a:rPr>
-              <a:t>📱</a:t>
-            </a:r>
-          </a:p>
-          <a:p>
-            <a:pPr algn="ctr">
-              <a:defRPr sz="900" b="1">
-                <a:solidFill>
-                  <a:srgbClr val="10B981"/>
-                </a:solidFill>
-                <a:latin typeface="Segoe UI"/>
-              </a:defRPr>
-            </a:pPr>
-            <a:r>
-              <a:rPr>
-                <a:latin typeface="TT Firs Neue" panose="020B0003030000020004" pitchFamily="34" charset="0"/>
-              </a:rPr>
-              <a:t>Scholar Home</a:t>
-            </a:r>
-          </a:p>
-          <a:p>
-            <a:pPr algn="ctr">
-              <a:defRPr sz="750">
-                <a:solidFill>
-                  <a:srgbClr val="64748B"/>
-                </a:solidFill>
-                <a:latin typeface="Segoe UI"/>
-              </a:defRPr>
-            </a:pPr>
-            <a:r>
-              <a:rPr>
-                <a:latin typeface="TT Firs Neue" panose="020B0003030000020004" pitchFamily="34" charset="0"/>
-              </a:rPr>
-              <a:t>Right-click → Change Picture</a:t>
-            </a:r>
-            <a:br>
-              <a:rPr>
-                <a:latin typeface="TT Firs Neue" panose="020B0003030000020004" pitchFamily="34" charset="0"/>
-              </a:rPr>
-            </a:br>
-            <a:r>
-              <a:rPr>
-                <a:latin typeface="TT Firs Neue" panose="020B0003030000020004" pitchFamily="34" charset="0"/>
-              </a:rPr>
-              <a:t>to replace with screenshot</a:t>
-            </a:r>
-          </a:p>
-        </p:txBody>
-      </p:sp>
-      <p:sp>
-        <p:nvSpPr>
-          <p:cNvPr id="10" name="Rounded Rectangle 9"/>
-          <p:cNvSpPr/>
-          <p:nvPr/>
-        </p:nvSpPr>
-        <p:spPr>
-          <a:xfrm>
-            <a:off x="6195060" y="1508760"/>
-            <a:ext cx="1600200" cy="3200400"/>
-          </a:xfrm>
-          <a:prstGeom prst="roundRect">
-            <a:avLst/>
-          </a:prstGeom>
-          <a:solidFill>
-            <a:srgbClr val="1E293B"/>
-          </a:solidFill>
-          <a:ln w="25400">
-            <a:solidFill>
-              <a:srgbClr val="10B981"/>
-            </a:solidFill>
-          </a:ln>
-        </p:spPr>
-        <p:style>
-          <a:lnRef idx="1">
-            <a:schemeClr val="accent1"/>
-          </a:lnRef>
-          <a:fillRef idx="3">
-            <a:schemeClr val="accent1"/>
-          </a:fillRef>
-          <a:effectRef idx="2">
-            <a:schemeClr val="accent1"/>
-          </a:effectRef>
-          <a:fontRef idx="minor">
-            <a:schemeClr val="lt1"/>
-          </a:fontRef>
-        </p:style>
-        <p:txBody>
-          <a:bodyPr wrap="square" lIns="137160" tIns="91440" rIns="137160" bIns="91440" rtlCol="0" anchor="ctr"/>
-          <a:lstStyle/>
-          <a:p>
-            <a:pPr algn="ctr"/>
-            <a:endParaRPr>
-              <a:latin typeface="TT Firs Neue" panose="020B0003030000020004" pitchFamily="34" charset="0"/>
-            </a:endParaRPr>
-          </a:p>
-          <a:p>
-            <a:pPr>
-              <a:defRPr sz="800"/>
-            </a:pPr>
-            <a:endParaRPr>
-              <a:latin typeface="TT Firs Neue" panose="020B0003030000020004" pitchFamily="34" charset="0"/>
-            </a:endParaRPr>
-          </a:p>
-          <a:p>
-            <a:pPr>
-              <a:defRPr sz="800"/>
-            </a:pPr>
-            <a:endParaRPr>
-              <a:latin typeface="TT Firs Neue" panose="020B0003030000020004" pitchFamily="34" charset="0"/>
-            </a:endParaRPr>
-          </a:p>
-          <a:p>
-            <a:pPr>
-              <a:defRPr sz="800"/>
-            </a:pPr>
-            <a:endParaRPr>
-              <a:latin typeface="TT Firs Neue" panose="020B0003030000020004" pitchFamily="34" charset="0"/>
-            </a:endParaRPr>
-          </a:p>
-          <a:p>
-            <a:pPr algn="ctr">
-              <a:defRPr sz="2800"/>
-            </a:pPr>
-            <a:r>
-              <a:rPr>
-                <a:latin typeface="TT Firs Neue" panose="020B0003030000020004" pitchFamily="34" charset="0"/>
-              </a:rPr>
-              <a:t>📱</a:t>
-            </a:r>
-          </a:p>
-          <a:p>
-            <a:pPr algn="ctr">
-              <a:defRPr sz="900" b="1">
-                <a:solidFill>
-                  <a:srgbClr val="10B981"/>
-                </a:solidFill>
-                <a:latin typeface="Segoe UI"/>
-              </a:defRPr>
-            </a:pPr>
-            <a:r>
-              <a:rPr>
-                <a:latin typeface="TT Firs Neue" panose="020B0003030000020004" pitchFamily="34" charset="0"/>
-              </a:rPr>
-              <a:t>Scholar Manuscripts</a:t>
-            </a:r>
-          </a:p>
-          <a:p>
-            <a:pPr algn="ctr">
-              <a:defRPr sz="750">
-                <a:solidFill>
-                  <a:srgbClr val="64748B"/>
-                </a:solidFill>
-                <a:latin typeface="Segoe UI"/>
-              </a:defRPr>
-            </a:pPr>
-            <a:r>
-              <a:rPr>
-                <a:latin typeface="TT Firs Neue" panose="020B0003030000020004" pitchFamily="34" charset="0"/>
-              </a:rPr>
-              <a:t>Right-click → Change Picture</a:t>
-            </a:r>
-            <a:br>
-              <a:rPr>
-                <a:latin typeface="TT Firs Neue" panose="020B0003030000020004" pitchFamily="34" charset="0"/>
-              </a:rPr>
-            </a:br>
-            <a:r>
-              <a:rPr>
-                <a:latin typeface="TT Firs Neue" panose="020B0003030000020004" pitchFamily="34" charset="0"/>
-              </a:rPr>
-              <a:t>to replace with screenshot</a:t>
-            </a:r>
-          </a:p>
-        </p:txBody>
-      </p:sp>
-      <p:sp>
-        <p:nvSpPr>
           <p:cNvPr id="11" name="Rounded Rectangle 10"/>
           <p:cNvSpPr/>
           <p:nvPr/>
@@ -4985,258 +5754,6 @@
       </p:sp>
       <p:sp>
         <p:nvSpPr>
-          <p:cNvPr id="13" name="Rounded Rectangle 12"/>
-          <p:cNvSpPr/>
-          <p:nvPr/>
-        </p:nvSpPr>
-        <p:spPr>
-          <a:xfrm>
-            <a:off x="8161020" y="1508760"/>
-            <a:ext cx="1600200" cy="3200400"/>
-          </a:xfrm>
-          <a:prstGeom prst="roundRect">
-            <a:avLst/>
-          </a:prstGeom>
-          <a:solidFill>
-            <a:srgbClr val="1E293B"/>
-          </a:solidFill>
-          <a:ln w="25400">
-            <a:solidFill>
-              <a:srgbClr val="F59E0B"/>
-            </a:solidFill>
-          </a:ln>
-        </p:spPr>
-        <p:style>
-          <a:lnRef idx="1">
-            <a:schemeClr val="accent1"/>
-          </a:lnRef>
-          <a:fillRef idx="3">
-            <a:schemeClr val="accent1"/>
-          </a:fillRef>
-          <a:effectRef idx="2">
-            <a:schemeClr val="accent1"/>
-          </a:effectRef>
-          <a:fontRef idx="minor">
-            <a:schemeClr val="lt1"/>
-          </a:fontRef>
-        </p:style>
-        <p:txBody>
-          <a:bodyPr wrap="square" lIns="137160" tIns="91440" rIns="137160" bIns="91440" rtlCol="0" anchor="ctr"/>
-          <a:lstStyle/>
-          <a:p>
-            <a:pPr algn="ctr"/>
-            <a:endParaRPr>
-              <a:latin typeface="TT Firs Neue" panose="020B0003030000020004" pitchFamily="34" charset="0"/>
-            </a:endParaRPr>
-          </a:p>
-          <a:p>
-            <a:pPr>
-              <a:defRPr sz="800"/>
-            </a:pPr>
-            <a:endParaRPr>
-              <a:latin typeface="TT Firs Neue" panose="020B0003030000020004" pitchFamily="34" charset="0"/>
-            </a:endParaRPr>
-          </a:p>
-          <a:p>
-            <a:pPr>
-              <a:defRPr sz="800"/>
-            </a:pPr>
-            <a:endParaRPr>
-              <a:latin typeface="TT Firs Neue" panose="020B0003030000020004" pitchFamily="34" charset="0"/>
-            </a:endParaRPr>
-          </a:p>
-          <a:p>
-            <a:pPr>
-              <a:defRPr sz="800"/>
-            </a:pPr>
-            <a:endParaRPr>
-              <a:latin typeface="TT Firs Neue" panose="020B0003030000020004" pitchFamily="34" charset="0"/>
-            </a:endParaRPr>
-          </a:p>
-          <a:p>
-            <a:pPr algn="ctr">
-              <a:defRPr sz="2800"/>
-            </a:pPr>
-            <a:r>
-              <a:rPr>
-                <a:latin typeface="TT Firs Neue" panose="020B0003030000020004" pitchFamily="34" charset="0"/>
-              </a:rPr>
-              <a:t>📱</a:t>
-            </a:r>
-          </a:p>
-          <a:p>
-            <a:pPr algn="ctr">
-              <a:defRPr sz="900" b="1">
-                <a:solidFill>
-                  <a:srgbClr val="F59E0B"/>
-                </a:solidFill>
-                <a:latin typeface="Segoe UI"/>
-              </a:defRPr>
-            </a:pPr>
-            <a:r>
-              <a:rPr>
-                <a:latin typeface="TT Firs Neue" panose="020B0003030000020004" pitchFamily="34" charset="0"/>
-              </a:rPr>
-              <a:t>Professor Home</a:t>
-            </a:r>
-          </a:p>
-          <a:p>
-            <a:pPr algn="ctr">
-              <a:defRPr sz="750">
-                <a:solidFill>
-                  <a:srgbClr val="64748B"/>
-                </a:solidFill>
-                <a:latin typeface="Segoe UI"/>
-              </a:defRPr>
-            </a:pPr>
-            <a:r>
-              <a:rPr>
-                <a:latin typeface="TT Firs Neue" panose="020B0003030000020004" pitchFamily="34" charset="0"/>
-              </a:rPr>
-              <a:t>Right-click → Change Picture</a:t>
-            </a:r>
-            <a:br>
-              <a:rPr>
-                <a:latin typeface="TT Firs Neue" panose="020B0003030000020004" pitchFamily="34" charset="0"/>
-              </a:rPr>
-            </a:br>
-            <a:r>
-              <a:rPr>
-                <a:latin typeface="TT Firs Neue" panose="020B0003030000020004" pitchFamily="34" charset="0"/>
-              </a:rPr>
-              <a:t>to replace with screenshot</a:t>
-            </a:r>
-          </a:p>
-        </p:txBody>
-      </p:sp>
-      <p:sp>
-        <p:nvSpPr>
-          <p:cNvPr id="14" name="Rounded Rectangle 13"/>
-          <p:cNvSpPr/>
-          <p:nvPr/>
-        </p:nvSpPr>
-        <p:spPr>
-          <a:xfrm>
-            <a:off x="9898380" y="1508760"/>
-            <a:ext cx="1600200" cy="3200400"/>
-          </a:xfrm>
-          <a:prstGeom prst="roundRect">
-            <a:avLst/>
-          </a:prstGeom>
-          <a:solidFill>
-            <a:srgbClr val="1E293B"/>
-          </a:solidFill>
-          <a:ln w="25400">
-            <a:solidFill>
-              <a:srgbClr val="F59E0B"/>
-            </a:solidFill>
-          </a:ln>
-        </p:spPr>
-        <p:style>
-          <a:lnRef idx="1">
-            <a:schemeClr val="accent1"/>
-          </a:lnRef>
-          <a:fillRef idx="3">
-            <a:schemeClr val="accent1"/>
-          </a:fillRef>
-          <a:effectRef idx="2">
-            <a:schemeClr val="accent1"/>
-          </a:effectRef>
-          <a:fontRef idx="minor">
-            <a:schemeClr val="lt1"/>
-          </a:fontRef>
-        </p:style>
-        <p:txBody>
-          <a:bodyPr wrap="square" lIns="137160" tIns="91440" rIns="137160" bIns="91440" rtlCol="0" anchor="ctr"/>
-          <a:lstStyle/>
-          <a:p>
-            <a:pPr algn="ctr"/>
-            <a:endParaRPr>
-              <a:latin typeface="TT Firs Neue" panose="020B0003030000020004" pitchFamily="34" charset="0"/>
-            </a:endParaRPr>
-          </a:p>
-          <a:p>
-            <a:pPr>
-              <a:defRPr sz="800"/>
-            </a:pPr>
-            <a:endParaRPr>
-              <a:latin typeface="TT Firs Neue" panose="020B0003030000020004" pitchFamily="34" charset="0"/>
-            </a:endParaRPr>
-          </a:p>
-          <a:p>
-            <a:pPr>
-              <a:defRPr sz="800"/>
-            </a:pPr>
-            <a:endParaRPr>
-              <a:latin typeface="TT Firs Neue" panose="020B0003030000020004" pitchFamily="34" charset="0"/>
-            </a:endParaRPr>
-          </a:p>
-          <a:p>
-            <a:pPr>
-              <a:defRPr sz="800"/>
-            </a:pPr>
-            <a:endParaRPr>
-              <a:latin typeface="TT Firs Neue" panose="020B0003030000020004" pitchFamily="34" charset="0"/>
-            </a:endParaRPr>
-          </a:p>
-          <a:p>
-            <a:pPr algn="ctr">
-              <a:defRPr sz="2800"/>
-            </a:pPr>
-            <a:r>
-              <a:rPr>
-                <a:latin typeface="TT Firs Neue" panose="020B0003030000020004" pitchFamily="34" charset="0"/>
-              </a:rPr>
-              <a:t>📱</a:t>
-            </a:r>
-          </a:p>
-          <a:p>
-            <a:pPr algn="ctr">
-              <a:defRPr sz="900" b="1">
-                <a:solidFill>
-                  <a:srgbClr val="F59E0B"/>
-                </a:solidFill>
-                <a:latin typeface="Segoe UI"/>
-              </a:defRPr>
-            </a:pPr>
-            <a:r>
-              <a:rPr>
-                <a:latin typeface="TT Firs Neue" panose="020B0003030000020004" pitchFamily="34" charset="0"/>
-              </a:rPr>
-              <a:t>Professor Patents</a:t>
-            </a:r>
-          </a:p>
-          <a:p>
-            <a:pPr algn="ctr">
-              <a:defRPr sz="750">
-                <a:solidFill>
-                  <a:srgbClr val="64748B"/>
-                </a:solidFill>
-                <a:latin typeface="Segoe UI"/>
-              </a:defRPr>
-            </a:pPr>
-            <a:r>
-              <a:rPr>
-                <a:latin typeface="TT Firs Neue" panose="020B0003030000020004" pitchFamily="34" charset="0"/>
-              </a:rPr>
-              <a:t>Right-click → Change Picture</a:t>
-            </a:r>
-            <a:br>
-              <a:rPr>
-                <a:latin typeface="TT Firs Neue" panose="020B0003030000020004" pitchFamily="34" charset="0"/>
-              </a:rPr>
-            </a:br>
-            <a:r>
-              <a:rPr>
-                <a:latin typeface="TT Firs Neue" panose="020B0003030000020004" pitchFamily="34" charset="0"/>
-              </a:rPr>
-              <a:t>to replace with screenshot</a:t>
-            </a:r>
-          </a:p>
-        </p:txBody>
-      </p:sp>
-      <p:sp>
-        <p:nvSpPr>
           <p:cNvPr id="15" name="Rounded Rectangle 14"/>
           <p:cNvSpPr/>
           <p:nvPr/>
@@ -5477,6 +5994,96 @@
           </a:p>
         </p:txBody>
       </p:sp>
+      <p:pic>
+        <p:nvPicPr>
+          <p:cNvPr id="6" name="Picture 5">
+            <a:extLst>
+              <a:ext uri="{FF2B5EF4-FFF2-40B4-BE49-F238E27FC236}">
+                <a16:creationId xmlns:a16="http://schemas.microsoft.com/office/drawing/2014/main" id="{9B7D702F-0264-55BB-0CC3-665FF00391D4}"/>
+              </a:ext>
+            </a:extLst>
+          </p:cNvPr>
+          <p:cNvPicPr>
+            <a:picLocks noChangeAspect="1"/>
+          </p:cNvPicPr>
+          <p:nvPr/>
+        </p:nvPicPr>
+        <p:blipFill>
+          <a:blip r:embed="rId3"/>
+          <a:stretch>
+            <a:fillRect/>
+          </a:stretch>
+        </p:blipFill>
+        <p:spPr>
+          <a:xfrm>
+            <a:off x="1486315" y="1404610"/>
+            <a:ext cx="1615185" cy="3304726"/>
+          </a:xfrm>
+          <a:prstGeom prst="rect">
+            <a:avLst/>
+          </a:prstGeom>
+        </p:spPr>
+      </p:pic>
+      <p:pic>
+        <p:nvPicPr>
+          <p:cNvPr id="22" name="Picture 21">
+            <a:extLst>
+              <a:ext uri="{FF2B5EF4-FFF2-40B4-BE49-F238E27FC236}">
+                <a16:creationId xmlns:a16="http://schemas.microsoft.com/office/drawing/2014/main" id="{7F94C06B-CED4-5792-A325-6FE82A3381CF}"/>
+              </a:ext>
+            </a:extLst>
+          </p:cNvPr>
+          <p:cNvPicPr>
+            <a:picLocks noChangeAspect="1"/>
+          </p:cNvPicPr>
+          <p:nvPr/>
+        </p:nvPicPr>
+        <p:blipFill>
+          <a:blip r:embed="rId4"/>
+          <a:stretch>
+            <a:fillRect/>
+          </a:stretch>
+        </p:blipFill>
+        <p:spPr>
+          <a:xfrm>
+            <a:off x="5468635" y="1448593"/>
+            <a:ext cx="1597764" cy="3260743"/>
+          </a:xfrm>
+          <a:prstGeom prst="rect">
+            <a:avLst/>
+          </a:prstGeom>
+        </p:spPr>
+      </p:pic>
+      <p:pic>
+        <p:nvPicPr>
+          <p:cNvPr id="24" name="Picture 23">
+            <a:extLst>
+              <a:ext uri="{FF2B5EF4-FFF2-40B4-BE49-F238E27FC236}">
+                <a16:creationId xmlns:a16="http://schemas.microsoft.com/office/drawing/2014/main" id="{3AC8C5C2-2873-39BE-3EB0-1F5BC655AE97}"/>
+              </a:ext>
+            </a:extLst>
+          </p:cNvPr>
+          <p:cNvPicPr>
+            <a:picLocks noChangeAspect="1"/>
+          </p:cNvPicPr>
+          <p:nvPr/>
+        </p:nvPicPr>
+        <p:blipFill>
+          <a:blip r:embed="rId5"/>
+          <a:stretch>
+            <a:fillRect/>
+          </a:stretch>
+        </p:blipFill>
+        <p:spPr>
+          <a:xfrm>
+            <a:off x="9338476" y="1476643"/>
+            <a:ext cx="1599802" cy="3260743"/>
+          </a:xfrm>
+          <a:prstGeom prst="rect">
+            <a:avLst/>
+          </a:prstGeom>
+        </p:spPr>
+      </p:pic>
     </p:spTree>
   </p:cSld>
   <p:clrMapOvr>
